--- a/ПРОЕКТ ПИТОН.pptx
+++ b/ПРОЕКТ ПИТОН.pptx
@@ -10,11 +10,9 @@
     <p:sldId id="258" r:id="rId4"/>
     <p:sldId id="259" r:id="rId5"/>
     <p:sldId id="260" r:id="rId6"/>
-    <p:sldId id="261" r:id="rId7"/>
-    <p:sldId id="262" r:id="rId8"/>
-    <p:sldId id="263" r:id="rId9"/>
-    <p:sldId id="264" r:id="rId10"/>
-    <p:sldId id="265" r:id="rId11"/>
+    <p:sldId id="263" r:id="rId7"/>
+    <p:sldId id="264" r:id="rId8"/>
+    <p:sldId id="265" r:id="rId9"/>
   </p:sldIdLst>
   <p:sldSz cx="12192000" cy="6858000"/>
   <p:notesSz cx="6858000" cy="9144000"/>
@@ -268,7 +266,7 @@
           <a:p>
             <a:fld id="{20168BCB-277C-43AB-8136-EC3718EEBA1D}" type="datetimeFigureOut">
               <a:rPr lang="ru-RU" smtClean="0"/>
-              <a:t>17.05.2026</a:t>
+              <a:t>23.05.2026</a:t>
             </a:fld>
             <a:endParaRPr lang="ru-RU"/>
           </a:p>
@@ -466,7 +464,7 @@
           <a:p>
             <a:fld id="{20168BCB-277C-43AB-8136-EC3718EEBA1D}" type="datetimeFigureOut">
               <a:rPr lang="ru-RU" smtClean="0"/>
-              <a:t>17.05.2026</a:t>
+              <a:t>23.05.2026</a:t>
             </a:fld>
             <a:endParaRPr lang="ru-RU"/>
           </a:p>
@@ -674,7 +672,7 @@
           <a:p>
             <a:fld id="{20168BCB-277C-43AB-8136-EC3718EEBA1D}" type="datetimeFigureOut">
               <a:rPr lang="ru-RU" smtClean="0"/>
-              <a:t>17.05.2026</a:t>
+              <a:t>23.05.2026</a:t>
             </a:fld>
             <a:endParaRPr lang="ru-RU"/>
           </a:p>
@@ -872,7 +870,7 @@
           <a:p>
             <a:fld id="{20168BCB-277C-43AB-8136-EC3718EEBA1D}" type="datetimeFigureOut">
               <a:rPr lang="ru-RU" smtClean="0"/>
-              <a:t>17.05.2026</a:t>
+              <a:t>23.05.2026</a:t>
             </a:fld>
             <a:endParaRPr lang="ru-RU"/>
           </a:p>
@@ -1147,7 +1145,7 @@
           <a:p>
             <a:fld id="{20168BCB-277C-43AB-8136-EC3718EEBA1D}" type="datetimeFigureOut">
               <a:rPr lang="ru-RU" smtClean="0"/>
-              <a:t>17.05.2026</a:t>
+              <a:t>23.05.2026</a:t>
             </a:fld>
             <a:endParaRPr lang="ru-RU"/>
           </a:p>
@@ -1412,7 +1410,7 @@
           <a:p>
             <a:fld id="{20168BCB-277C-43AB-8136-EC3718EEBA1D}" type="datetimeFigureOut">
               <a:rPr lang="ru-RU" smtClean="0"/>
-              <a:t>17.05.2026</a:t>
+              <a:t>23.05.2026</a:t>
             </a:fld>
             <a:endParaRPr lang="ru-RU"/>
           </a:p>
@@ -1824,7 +1822,7 @@
           <a:p>
             <a:fld id="{20168BCB-277C-43AB-8136-EC3718EEBA1D}" type="datetimeFigureOut">
               <a:rPr lang="ru-RU" smtClean="0"/>
-              <a:t>17.05.2026</a:t>
+              <a:t>23.05.2026</a:t>
             </a:fld>
             <a:endParaRPr lang="ru-RU"/>
           </a:p>
@@ -1965,7 +1963,7 @@
           <a:p>
             <a:fld id="{20168BCB-277C-43AB-8136-EC3718EEBA1D}" type="datetimeFigureOut">
               <a:rPr lang="ru-RU" smtClean="0"/>
-              <a:t>17.05.2026</a:t>
+              <a:t>23.05.2026</a:t>
             </a:fld>
             <a:endParaRPr lang="ru-RU"/>
           </a:p>
@@ -2078,7 +2076,7 @@
           <a:p>
             <a:fld id="{20168BCB-277C-43AB-8136-EC3718EEBA1D}" type="datetimeFigureOut">
               <a:rPr lang="ru-RU" smtClean="0"/>
-              <a:t>17.05.2026</a:t>
+              <a:t>23.05.2026</a:t>
             </a:fld>
             <a:endParaRPr lang="ru-RU"/>
           </a:p>
@@ -2389,7 +2387,7 @@
           <a:p>
             <a:fld id="{20168BCB-277C-43AB-8136-EC3718EEBA1D}" type="datetimeFigureOut">
               <a:rPr lang="ru-RU" smtClean="0"/>
-              <a:t>17.05.2026</a:t>
+              <a:t>23.05.2026</a:t>
             </a:fld>
             <a:endParaRPr lang="ru-RU"/>
           </a:p>
@@ -2677,7 +2675,7 @@
           <a:p>
             <a:fld id="{20168BCB-277C-43AB-8136-EC3718EEBA1D}" type="datetimeFigureOut">
               <a:rPr lang="ru-RU" smtClean="0"/>
-              <a:t>17.05.2026</a:t>
+              <a:t>23.05.2026</a:t>
             </a:fld>
             <a:endParaRPr lang="ru-RU"/>
           </a:p>
@@ -2918,7 +2916,7 @@
           <a:p>
             <a:fld id="{20168BCB-277C-43AB-8136-EC3718EEBA1D}" type="datetimeFigureOut">
               <a:rPr lang="ru-RU" smtClean="0"/>
-              <a:t>17.05.2026</a:t>
+              <a:t>23.05.2026</a:t>
             </a:fld>
             <a:endParaRPr lang="ru-RU"/>
           </a:p>
@@ -3410,7 +3408,7 @@
                 <a:solidFill>
                   <a:schemeClr val="bg1"/>
                 </a:solidFill>
-                <a:latin typeface="DejaVu Sans Condensed" panose="020B0606030804020204" pitchFamily="34" charset="0"/>
+                <a:latin typeface="Bahnschrift SemiBold SemiConden" panose="020B0502040204020203" pitchFamily="34" charset="0"/>
                 <a:ea typeface="DejaVu Sans Condensed" panose="020B0606030804020204" pitchFamily="34" charset="0"/>
                 <a:cs typeface="DejaVu Sans Condensed" panose="020B0606030804020204" pitchFamily="34" charset="0"/>
               </a:rPr>
@@ -3450,7 +3448,7 @@
                 <a:solidFill>
                   <a:schemeClr val="bg1"/>
                 </a:solidFill>
-                <a:latin typeface="DejaVu Sans Condensed" panose="020B0606030804020204" pitchFamily="34" charset="0"/>
+                <a:latin typeface="Bahnschrift SemiBold Condensed" panose="020B0502040204020203" pitchFamily="34" charset="0"/>
                 <a:ea typeface="DejaVu Sans Condensed" panose="020B0606030804020204" pitchFamily="34" charset="0"/>
                 <a:cs typeface="DejaVu Sans Condensed" panose="020B0606030804020204" pitchFamily="34" charset="0"/>
               </a:rPr>
@@ -3680,70 +3678,6 @@
     <p:extLst>
       <p:ext uri="{BB962C8B-B14F-4D97-AF65-F5344CB8AC3E}">
         <p14:creationId xmlns:p14="http://schemas.microsoft.com/office/powerpoint/2010/main" val="3000411282"/>
-      </p:ext>
-    </p:extLst>
-  </p:cSld>
-  <p:clrMapOvr>
-    <a:masterClrMapping/>
-  </p:clrMapOvr>
-</p:sld>
-</file>
-
-<file path=ppt/slides/slide10.xml><?xml version="1.0" encoding="utf-8"?>
-<p:sld xmlns:a="http://schemas.openxmlformats.org/drawingml/2006/main" xmlns:r="http://schemas.openxmlformats.org/officeDocument/2006/relationships" xmlns:p="http://schemas.openxmlformats.org/presentationml/2006/main">
-  <p:cSld>
-    <p:spTree>
-      <p:nvGrpSpPr>
-        <p:cNvPr id="1" name=""/>
-        <p:cNvGrpSpPr/>
-        <p:nvPr/>
-      </p:nvGrpSpPr>
-      <p:grpSpPr>
-        <a:xfrm>
-          <a:off x="0" y="0"/>
-          <a:ext cx="0" cy="0"/>
-          <a:chOff x="0" y="0"/>
-          <a:chExt cx="0" cy="0"/>
-        </a:xfrm>
-      </p:grpSpPr>
-      <p:sp>
-        <p:nvSpPr>
-          <p:cNvPr id="2" name="Заголовок 1">
-            <a:extLst>
-              <a:ext uri="{FF2B5EF4-FFF2-40B4-BE49-F238E27FC236}">
-                <a16:creationId xmlns:a16="http://schemas.microsoft.com/office/drawing/2014/main" id="{BEBD06C4-9DD5-4C01-924E-25C48BCFCCC3}"/>
-              </a:ext>
-            </a:extLst>
-          </p:cNvPr>
-          <p:cNvSpPr>
-            <a:spLocks noGrp="1"/>
-          </p:cNvSpPr>
-          <p:nvPr>
-            <p:ph type="title"/>
-          </p:nvPr>
-        </p:nvSpPr>
-        <p:spPr>
-          <a:xfrm>
-            <a:off x="838200" y="2766218"/>
-            <a:ext cx="10515600" cy="1325563"/>
-          </a:xfrm>
-        </p:spPr>
-        <p:txBody>
-          <a:bodyPr/>
-          <a:lstStyle/>
-          <a:p>
-            <a:pPr algn="ctr"/>
-            <a:r>
-              <a:rPr lang="ru-RU" dirty="0"/>
-              <a:t>Спасибо за внимание!</a:t>
-            </a:r>
-          </a:p>
-        </p:txBody>
-      </p:sp>
-    </p:spTree>
-    <p:extLst>
-      <p:ext uri="{BB962C8B-B14F-4D97-AF65-F5344CB8AC3E}">
-        <p14:creationId xmlns:p14="http://schemas.microsoft.com/office/powerpoint/2010/main" val="2988047741"/>
       </p:ext>
     </p:extLst>
   </p:cSld>
@@ -3845,7 +3779,7 @@
                 <a:solidFill>
                   <a:schemeClr val="bg1"/>
                 </a:solidFill>
-                <a:latin typeface="Liberation Serif" panose="02020603050405020304" pitchFamily="18" charset="0"/>
+                <a:latin typeface="Bahnschrift SemiBold SemiConden" panose="020B0502040204020203" pitchFamily="34" charset="0"/>
                 <a:ea typeface="Liberation Serif" panose="02020603050405020304" pitchFamily="18" charset="0"/>
                 <a:cs typeface="Liberation Serif" panose="02020603050405020304" pitchFamily="18" charset="0"/>
               </a:rPr>
@@ -3888,7 +3822,7 @@
                 <a:solidFill>
                   <a:schemeClr val="bg1"/>
                 </a:solidFill>
-                <a:latin typeface="Liberation Serif" panose="02020603050405020304" pitchFamily="18" charset="0"/>
+                <a:latin typeface="Bahnschrift SemiBold SemiConden" panose="020B0502040204020203" pitchFamily="34" charset="0"/>
                 <a:ea typeface="Liberation Serif" panose="02020603050405020304" pitchFamily="18" charset="0"/>
                 <a:cs typeface="Liberation Serif" panose="02020603050405020304" pitchFamily="18" charset="0"/>
               </a:rPr>
@@ -3899,7 +3833,7 @@
                 <a:solidFill>
                   <a:schemeClr val="bg1"/>
                 </a:solidFill>
-                <a:latin typeface="Liberation Serif" panose="02020603050405020304" pitchFamily="18" charset="0"/>
+                <a:latin typeface="Bahnschrift SemiBold SemiConden" panose="020B0502040204020203" pitchFamily="34" charset="0"/>
                 <a:ea typeface="Liberation Serif" panose="02020603050405020304" pitchFamily="18" charset="0"/>
                 <a:cs typeface="Liberation Serif" panose="02020603050405020304" pitchFamily="18" charset="0"/>
               </a:rPr>
@@ -3910,7 +3844,7 @@
                 <a:solidFill>
                   <a:schemeClr val="bg1"/>
                 </a:solidFill>
-                <a:latin typeface="Liberation Serif" panose="02020603050405020304" pitchFamily="18" charset="0"/>
+                <a:latin typeface="Bahnschrift SemiBold SemiConden" panose="020B0502040204020203" pitchFamily="34" charset="0"/>
                 <a:ea typeface="Liberation Serif" panose="02020603050405020304" pitchFamily="18" charset="0"/>
                 <a:cs typeface="Liberation Serif" panose="02020603050405020304" pitchFamily="18" charset="0"/>
               </a:rPr>
@@ -3923,7 +3857,7 @@
                 <a:solidFill>
                   <a:schemeClr val="bg1"/>
                 </a:solidFill>
-                <a:latin typeface="Liberation Serif" panose="02020603050405020304" pitchFamily="18" charset="0"/>
+                <a:latin typeface="Bahnschrift SemiBold SemiConden" panose="020B0502040204020203" pitchFamily="34" charset="0"/>
                 <a:ea typeface="Liberation Serif" panose="02020603050405020304" pitchFamily="18" charset="0"/>
                 <a:cs typeface="Liberation Serif" panose="02020603050405020304" pitchFamily="18" charset="0"/>
               </a:rPr>
@@ -3936,7 +3870,7 @@
                 <a:solidFill>
                   <a:schemeClr val="bg1"/>
                 </a:solidFill>
-                <a:latin typeface="Liberation Serif" panose="02020603050405020304" pitchFamily="18" charset="0"/>
+                <a:latin typeface="Bahnschrift SemiBold SemiConden" panose="020B0502040204020203" pitchFamily="34" charset="0"/>
                 <a:ea typeface="Liberation Serif" panose="02020603050405020304" pitchFamily="18" charset="0"/>
                 <a:cs typeface="Liberation Serif" panose="02020603050405020304" pitchFamily="18" charset="0"/>
               </a:rPr>
@@ -3949,7 +3883,7 @@
                 <a:solidFill>
                   <a:schemeClr val="bg1"/>
                 </a:solidFill>
-                <a:latin typeface="Liberation Serif" panose="02020603050405020304" pitchFamily="18" charset="0"/>
+                <a:latin typeface="Bahnschrift SemiBold SemiConden" panose="020B0502040204020203" pitchFamily="34" charset="0"/>
                 <a:ea typeface="Liberation Serif" panose="02020603050405020304" pitchFamily="18" charset="0"/>
                 <a:cs typeface="Liberation Serif" panose="02020603050405020304" pitchFamily="18" charset="0"/>
               </a:rPr>
@@ -3962,7 +3896,7 @@
                 <a:solidFill>
                   <a:schemeClr val="bg1"/>
                 </a:solidFill>
-                <a:latin typeface="Liberation Serif" panose="02020603050405020304" pitchFamily="18" charset="0"/>
+                <a:latin typeface="Bahnschrift SemiBold SemiConden" panose="020B0502040204020203" pitchFamily="34" charset="0"/>
                 <a:ea typeface="Liberation Serif" panose="02020603050405020304" pitchFamily="18" charset="0"/>
                 <a:cs typeface="Liberation Serif" panose="02020603050405020304" pitchFamily="18" charset="0"/>
               </a:rPr>
@@ -4225,7 +4159,7 @@
                 <a:solidFill>
                   <a:schemeClr val="bg1"/>
                 </a:solidFill>
-                <a:latin typeface="Liberation Serif" panose="02020603050405020304" pitchFamily="18" charset="0"/>
+                <a:latin typeface="Bahnschrift SemiBold SemiConden" panose="020B0502040204020203" pitchFamily="34" charset="0"/>
                 <a:ea typeface="Liberation Serif" panose="02020603050405020304" pitchFamily="18" charset="0"/>
                 <a:cs typeface="Liberation Serif" panose="02020603050405020304" pitchFamily="18" charset="0"/>
               </a:rPr>
@@ -4260,7 +4194,7 @@
                 <a:solidFill>
                   <a:schemeClr val="bg1"/>
                 </a:solidFill>
-                <a:latin typeface="Liberation Serif" panose="02020603050405020304" pitchFamily="18" charset="0"/>
+                <a:latin typeface="Bahnschrift SemiBold SemiConden" panose="020B0502040204020203" pitchFamily="34" charset="0"/>
                 <a:ea typeface="Liberation Serif" panose="02020603050405020304" pitchFamily="18" charset="0"/>
                 <a:cs typeface="Liberation Serif" panose="02020603050405020304" pitchFamily="18" charset="0"/>
               </a:rPr>
@@ -4271,7 +4205,7 @@
                 <a:solidFill>
                   <a:schemeClr val="bg1"/>
                 </a:solidFill>
-                <a:latin typeface="Liberation Serif" panose="02020603050405020304" pitchFamily="18" charset="0"/>
+                <a:latin typeface="Bahnschrift SemiBold SemiConden" panose="020B0502040204020203" pitchFamily="34" charset="0"/>
                 <a:ea typeface="Liberation Serif" panose="02020603050405020304" pitchFamily="18" charset="0"/>
                 <a:cs typeface="Liberation Serif" panose="02020603050405020304" pitchFamily="18" charset="0"/>
               </a:rPr>
@@ -4281,7 +4215,7 @@
               <a:solidFill>
                 <a:schemeClr val="bg1"/>
               </a:solidFill>
-              <a:latin typeface="Liberation Serif" panose="02020603050405020304" pitchFamily="18" charset="0"/>
+              <a:latin typeface="Bahnschrift SemiBold SemiConden" panose="020B0502040204020203" pitchFamily="34" charset="0"/>
               <a:ea typeface="Liberation Serif" panose="02020603050405020304" pitchFamily="18" charset="0"/>
               <a:cs typeface="Liberation Serif" panose="02020603050405020304" pitchFamily="18" charset="0"/>
             </a:endParaRPr>
@@ -4292,7 +4226,7 @@
                 <a:solidFill>
                   <a:schemeClr val="bg1"/>
                 </a:solidFill>
-                <a:latin typeface="Liberation Serif" panose="02020603050405020304" pitchFamily="18" charset="0"/>
+                <a:latin typeface="Bahnschrift SemiBold SemiConden" panose="020B0502040204020203" pitchFamily="34" charset="0"/>
                 <a:ea typeface="Liberation Serif" panose="02020603050405020304" pitchFamily="18" charset="0"/>
                 <a:cs typeface="Liberation Serif" panose="02020603050405020304" pitchFamily="18" charset="0"/>
               </a:rPr>
@@ -4303,7 +4237,7 @@
                 <a:solidFill>
                   <a:schemeClr val="bg1"/>
                 </a:solidFill>
-                <a:latin typeface="Liberation Serif" panose="02020603050405020304" pitchFamily="18" charset="0"/>
+                <a:latin typeface="Bahnschrift SemiBold SemiConden" panose="020B0502040204020203" pitchFamily="34" charset="0"/>
                 <a:ea typeface="Liberation Serif" panose="02020603050405020304" pitchFamily="18" charset="0"/>
                 <a:cs typeface="Liberation Serif" panose="02020603050405020304" pitchFamily="18" charset="0"/>
               </a:rPr>
@@ -4313,7 +4247,7 @@
               <a:solidFill>
                 <a:schemeClr val="bg1"/>
               </a:solidFill>
-              <a:latin typeface="Liberation Serif" panose="02020603050405020304" pitchFamily="18" charset="0"/>
+              <a:latin typeface="Bahnschrift SemiBold SemiConden" panose="020B0502040204020203" pitchFamily="34" charset="0"/>
               <a:ea typeface="Liberation Serif" panose="02020603050405020304" pitchFamily="18" charset="0"/>
               <a:cs typeface="Liberation Serif" panose="02020603050405020304" pitchFamily="18" charset="0"/>
             </a:endParaRPr>
@@ -4324,7 +4258,7 @@
                 <a:solidFill>
                   <a:schemeClr val="bg1"/>
                 </a:solidFill>
-                <a:latin typeface="Liberation Serif" panose="02020603050405020304" pitchFamily="18" charset="0"/>
+                <a:latin typeface="Bahnschrift SemiBold SemiConden" panose="020B0502040204020203" pitchFamily="34" charset="0"/>
                 <a:ea typeface="Liberation Serif" panose="02020603050405020304" pitchFamily="18" charset="0"/>
                 <a:cs typeface="Liberation Serif" panose="02020603050405020304" pitchFamily="18" charset="0"/>
               </a:rPr>
@@ -4335,7 +4269,7 @@
                 <a:solidFill>
                   <a:schemeClr val="bg1"/>
                 </a:solidFill>
-                <a:latin typeface="Liberation Serif" panose="02020603050405020304" pitchFamily="18" charset="0"/>
+                <a:latin typeface="Bahnschrift SemiBold SemiConden" panose="020B0502040204020203" pitchFamily="34" charset="0"/>
                 <a:ea typeface="Liberation Serif" panose="02020603050405020304" pitchFamily="18" charset="0"/>
                 <a:cs typeface="Liberation Serif" panose="02020603050405020304" pitchFamily="18" charset="0"/>
               </a:rPr>
@@ -4345,7 +4279,7 @@
               <a:solidFill>
                 <a:schemeClr val="bg1"/>
               </a:solidFill>
-              <a:latin typeface="Liberation Serif" panose="02020603050405020304" pitchFamily="18" charset="0"/>
+              <a:latin typeface="Bahnschrift SemiBold SemiConden" panose="020B0502040204020203" pitchFamily="34" charset="0"/>
               <a:ea typeface="Liberation Serif" panose="02020603050405020304" pitchFamily="18" charset="0"/>
               <a:cs typeface="Liberation Serif" panose="02020603050405020304" pitchFamily="18" charset="0"/>
             </a:endParaRPr>
@@ -4457,7 +4391,7 @@
                 <a:solidFill>
                   <a:schemeClr val="bg1"/>
                 </a:solidFill>
-                <a:latin typeface="Liberation Serif" panose="02020603050405020304" pitchFamily="18" charset="0"/>
+                <a:latin typeface="Bahnschrift SemiBold SemiConden" panose="020B0502040204020203" pitchFamily="34" charset="0"/>
                 <a:ea typeface="Liberation Serif" panose="02020603050405020304" pitchFamily="18" charset="0"/>
                 <a:cs typeface="Liberation Serif" panose="02020603050405020304" pitchFamily="18" charset="0"/>
               </a:rPr>
@@ -4821,10 +4755,64 @@
       </p:grpSpPr>
       <p:sp>
         <p:nvSpPr>
+          <p:cNvPr id="4" name="Прямоугольник 3">
+            <a:extLst>
+              <a:ext uri="{FF2B5EF4-FFF2-40B4-BE49-F238E27FC236}">
+                <a16:creationId xmlns:a16="http://schemas.microsoft.com/office/drawing/2014/main" id="{5C0D9598-60C3-695F-EF37-478823936D39}"/>
+              </a:ext>
+            </a:extLst>
+          </p:cNvPr>
+          <p:cNvSpPr/>
+          <p:nvPr/>
+        </p:nvSpPr>
+        <p:spPr>
+          <a:xfrm>
+            <a:off x="0" y="0"/>
+            <a:ext cx="12192000" cy="6858000"/>
+          </a:xfrm>
+          <a:prstGeom prst="rect">
+            <a:avLst/>
+          </a:prstGeom>
+          <a:solidFill>
+            <a:srgbClr val="002060"/>
+          </a:solidFill>
+        </p:spPr>
+        <p:style>
+          <a:lnRef idx="2">
+            <a:schemeClr val="accent1">
+              <a:shade val="50000"/>
+            </a:schemeClr>
+          </a:lnRef>
+          <a:fillRef idx="1">
+            <a:schemeClr val="accent1"/>
+          </a:fillRef>
+          <a:effectRef idx="0">
+            <a:schemeClr val="accent1"/>
+          </a:effectRef>
+          <a:fontRef idx="minor">
+            <a:schemeClr val="lt1"/>
+          </a:fontRef>
+        </p:style>
+        <p:txBody>
+          <a:bodyPr rtlCol="0" anchor="ctr"/>
+          <a:lstStyle/>
+          <a:p>
+            <a:pPr algn="ctr"/>
+            <a:endParaRPr lang="ru-RU">
+              <a:solidFill>
+                <a:schemeClr val="bg1"/>
+              </a:solidFill>
+              <a:latin typeface="Bahnschrift SemiBold SemiConden" panose="020B0502040204020203" pitchFamily="34" charset="0"/>
+            </a:endParaRPr>
+          </a:p>
+        </p:txBody>
+      </p:sp>
+      <p:sp>
+        <p:nvSpPr>
           <p:cNvPr id="2" name="Заголовок 1">
             <a:extLst>
               <a:ext uri="{FF2B5EF4-FFF2-40B4-BE49-F238E27FC236}">
-                <a16:creationId xmlns:a16="http://schemas.microsoft.com/office/drawing/2014/main" id="{985854C9-D0B8-4A0C-BDDD-C3540D69384B}"/>
+                <a16:creationId xmlns:a16="http://schemas.microsoft.com/office/drawing/2014/main" id="{85AF70B3-888B-4B35-9AB0-987D2ED7BCC8}"/>
               </a:ext>
             </a:extLst>
           </p:cNvPr>
@@ -4841,8 +4829,13 @@
           <a:lstStyle/>
           <a:p>
             <a:r>
-              <a:rPr lang="ru-RU" dirty="0"/>
-              <a:t>Видео, как работает ваше приложение</a:t>
+              <a:rPr lang="ru-RU" dirty="0">
+                <a:solidFill>
+                  <a:schemeClr val="bg1"/>
+                </a:solidFill>
+                <a:latin typeface="Bahnschrift SemiBold SemiConden" panose="020B0502040204020203" pitchFamily="34" charset="0"/>
+              </a:rPr>
+              <a:t>Будущее проекта</a:t>
             </a:r>
           </a:p>
         </p:txBody>
@@ -4852,7 +4845,7 @@
           <p:cNvPr id="3" name="Объект 2">
             <a:extLst>
               <a:ext uri="{FF2B5EF4-FFF2-40B4-BE49-F238E27FC236}">
-                <a16:creationId xmlns:a16="http://schemas.microsoft.com/office/drawing/2014/main" id="{92D6D911-DA3F-4A4C-B5D8-FFF037056913}"/>
+                <a16:creationId xmlns:a16="http://schemas.microsoft.com/office/drawing/2014/main" id="{B8A6D778-10EF-4D17-9414-5023E6652829}"/>
               </a:ext>
             </a:extLst>
           </p:cNvPr>
@@ -4868,20 +4861,41 @@
           <a:bodyPr/>
           <a:lstStyle/>
           <a:p>
-            <a:pPr marL="0" indent="0">
-              <a:buNone/>
-            </a:pPr>
-            <a:r>
-              <a:rPr lang="ru-RU" dirty="0"/>
-              <a:t>Можно вставить разные варианты работы приложения</a:t>
-            </a:r>
+            <a:r>
+              <a:rPr lang="ru-RU" dirty="0">
+                <a:solidFill>
+                  <a:schemeClr val="bg1"/>
+                </a:solidFill>
+                <a:latin typeface="Bahnschrift SemiBold SemiConden" panose="020B0502040204020203" pitchFamily="34" charset="0"/>
+              </a:rPr>
+              <a:t>Добавить больше функций</a:t>
+            </a:r>
+          </a:p>
+          <a:p>
+            <a:r>
+              <a:rPr lang="ru-RU" dirty="0">
+                <a:solidFill>
+                  <a:schemeClr val="bg1"/>
+                </a:solidFill>
+                <a:latin typeface="Bahnschrift SemiBold SemiConden" panose="020B0502040204020203" pitchFamily="34" charset="0"/>
+              </a:rPr>
+              <a:t>Возможно рисование на фото</a:t>
+            </a:r>
+          </a:p>
+          <a:p>
+            <a:endParaRPr lang="en-US" dirty="0">
+              <a:solidFill>
+                <a:schemeClr val="bg1"/>
+              </a:solidFill>
+              <a:latin typeface="Bahnschrift SemiBold SemiConden" panose="020B0502040204020203" pitchFamily="34" charset="0"/>
+            </a:endParaRPr>
           </a:p>
         </p:txBody>
       </p:sp>
     </p:spTree>
     <p:extLst>
       <p:ext uri="{BB962C8B-B14F-4D97-AF65-F5344CB8AC3E}">
-        <p14:creationId xmlns:p14="http://schemas.microsoft.com/office/powerpoint/2010/main" val="207794491"/>
+        <p14:creationId xmlns:p14="http://schemas.microsoft.com/office/powerpoint/2010/main" val="1797280413"/>
       </p:ext>
     </p:extLst>
   </p:cSld>
@@ -4910,10 +4924,64 @@
       </p:grpSpPr>
       <p:sp>
         <p:nvSpPr>
+          <p:cNvPr id="4" name="Прямоугольник 3">
+            <a:extLst>
+              <a:ext uri="{FF2B5EF4-FFF2-40B4-BE49-F238E27FC236}">
+                <a16:creationId xmlns:a16="http://schemas.microsoft.com/office/drawing/2014/main" id="{2AE29C08-084D-85B4-9CE0-D5AF087A96E5}"/>
+              </a:ext>
+            </a:extLst>
+          </p:cNvPr>
+          <p:cNvSpPr/>
+          <p:nvPr/>
+        </p:nvSpPr>
+        <p:spPr>
+          <a:xfrm>
+            <a:off x="0" y="0"/>
+            <a:ext cx="12192000" cy="6858000"/>
+          </a:xfrm>
+          <a:prstGeom prst="rect">
+            <a:avLst/>
+          </a:prstGeom>
+          <a:solidFill>
+            <a:srgbClr val="002060"/>
+          </a:solidFill>
+        </p:spPr>
+        <p:style>
+          <a:lnRef idx="2">
+            <a:schemeClr val="accent1">
+              <a:shade val="50000"/>
+            </a:schemeClr>
+          </a:lnRef>
+          <a:fillRef idx="1">
+            <a:schemeClr val="accent1"/>
+          </a:fillRef>
+          <a:effectRef idx="0">
+            <a:schemeClr val="accent1"/>
+          </a:effectRef>
+          <a:fontRef idx="minor">
+            <a:schemeClr val="lt1"/>
+          </a:fontRef>
+        </p:style>
+        <p:txBody>
+          <a:bodyPr rtlCol="0" anchor="ctr"/>
+          <a:lstStyle/>
+          <a:p>
+            <a:pPr algn="ctr"/>
+            <a:endParaRPr lang="ru-RU">
+              <a:solidFill>
+                <a:schemeClr val="bg1"/>
+              </a:solidFill>
+              <a:latin typeface="Bahnschrift SemiBold SemiConden" panose="020B0502040204020203" pitchFamily="34" charset="0"/>
+            </a:endParaRPr>
+          </a:p>
+        </p:txBody>
+      </p:sp>
+      <p:sp>
+        <p:nvSpPr>
           <p:cNvPr id="2" name="Заголовок 1">
             <a:extLst>
               <a:ext uri="{FF2B5EF4-FFF2-40B4-BE49-F238E27FC236}">
-                <a16:creationId xmlns:a16="http://schemas.microsoft.com/office/drawing/2014/main" id="{FE4474C4-FD97-4315-A7BE-CDCB7D576557}"/>
+                <a16:creationId xmlns:a16="http://schemas.microsoft.com/office/drawing/2014/main" id="{31696C5B-0746-4725-AACC-953174C4CC3C}"/>
               </a:ext>
             </a:extLst>
           </p:cNvPr>
@@ -4930,8 +4998,13 @@
           <a:lstStyle/>
           <a:p>
             <a:r>
-              <a:rPr lang="ru-RU" dirty="0"/>
-              <a:t>Реализация приложения</a:t>
+              <a:rPr lang="ru-RU" dirty="0">
+                <a:solidFill>
+                  <a:schemeClr val="bg1"/>
+                </a:solidFill>
+                <a:latin typeface="Bahnschrift SemiBold SemiConden" panose="020B0502040204020203" pitchFamily="34" charset="0"/>
+              </a:rPr>
+              <a:t>Собственное впечатление от проекта</a:t>
             </a:r>
           </a:p>
         </p:txBody>
@@ -4941,7 +5014,7 @@
           <p:cNvPr id="3" name="Объект 2">
             <a:extLst>
               <a:ext uri="{FF2B5EF4-FFF2-40B4-BE49-F238E27FC236}">
-                <a16:creationId xmlns:a16="http://schemas.microsoft.com/office/drawing/2014/main" id="{8B257293-DBEA-425F-8ADD-71F657754FEF}"/>
+                <a16:creationId xmlns:a16="http://schemas.microsoft.com/office/drawing/2014/main" id="{3B31CDFF-B37D-4042-BEA5-4B6E199BA6EB}"/>
               </a:ext>
             </a:extLst>
           </p:cNvPr>
@@ -4958,20 +5031,24 @@
           <a:lstStyle/>
           <a:p>
             <a:r>
-              <a:rPr lang="ru-RU" dirty="0"/>
-              <a:t>Вы создали приложение, пусть его использует минимум 3 человека (мама, папа, сестра, брат, дедушка, подруга, друг)</a:t>
-            </a:r>
-          </a:p>
-          <a:p>
-            <a:r>
-              <a:rPr lang="ru-RU" dirty="0"/>
-              <a:t>Вы должны получить от них обратную связь (общее впечатление от проекта, преимущества и недостатки, что понравилось, что хотелось бы доработать, хотели бы они пользоваться вашим проектом и т.д.)</a:t>
-            </a:r>
-          </a:p>
-          <a:p>
-            <a:r>
-              <a:rPr lang="ru-RU" dirty="0"/>
-              <a:t>Кому полезно это приложение? Что оно развивает?</a:t>
+              <a:rPr lang="ru-RU" dirty="0">
+                <a:solidFill>
+                  <a:schemeClr val="bg1"/>
+                </a:solidFill>
+                <a:latin typeface="Bahnschrift SemiBold SemiConden" panose="020B0502040204020203" pitchFamily="34" charset="0"/>
+              </a:rPr>
+              <a:t>Делать этот проект мне было довольно интересно.</a:t>
+            </a:r>
+          </a:p>
+          <a:p>
+            <a:r>
+              <a:rPr lang="ru-RU" dirty="0">
+                <a:solidFill>
+                  <a:schemeClr val="bg1"/>
+                </a:solidFill>
+                <a:latin typeface="Bahnschrift SemiBold SemiConden" panose="020B0502040204020203" pitchFamily="34" charset="0"/>
+              </a:rPr>
+              <a:t>Некоторые части, например интерфейс, дались легко, некоторые части функционала посложнее.</a:t>
             </a:r>
           </a:p>
         </p:txBody>
@@ -4979,7 +5056,7 @@
     </p:spTree>
     <p:extLst>
       <p:ext uri="{BB962C8B-B14F-4D97-AF65-F5344CB8AC3E}">
-        <p14:creationId xmlns:p14="http://schemas.microsoft.com/office/powerpoint/2010/main" val="2805829433"/>
+        <p14:creationId xmlns:p14="http://schemas.microsoft.com/office/powerpoint/2010/main" val="1336577857"/>
       </p:ext>
     </p:extLst>
   </p:cSld>
@@ -5008,10 +5085,64 @@
       </p:grpSpPr>
       <p:sp>
         <p:nvSpPr>
+          <p:cNvPr id="3" name="Прямоугольник 2">
+            <a:extLst>
+              <a:ext uri="{FF2B5EF4-FFF2-40B4-BE49-F238E27FC236}">
+                <a16:creationId xmlns:a16="http://schemas.microsoft.com/office/drawing/2014/main" id="{070EFA15-BCD0-E49A-7527-4427236471F5}"/>
+              </a:ext>
+            </a:extLst>
+          </p:cNvPr>
+          <p:cNvSpPr/>
+          <p:nvPr/>
+        </p:nvSpPr>
+        <p:spPr>
+          <a:xfrm>
+            <a:off x="0" y="0"/>
+            <a:ext cx="12192000" cy="6858000"/>
+          </a:xfrm>
+          <a:prstGeom prst="rect">
+            <a:avLst/>
+          </a:prstGeom>
+          <a:solidFill>
+            <a:srgbClr val="002060"/>
+          </a:solidFill>
+        </p:spPr>
+        <p:style>
+          <a:lnRef idx="2">
+            <a:schemeClr val="accent1">
+              <a:shade val="50000"/>
+            </a:schemeClr>
+          </a:lnRef>
+          <a:fillRef idx="1">
+            <a:schemeClr val="accent1"/>
+          </a:fillRef>
+          <a:effectRef idx="0">
+            <a:schemeClr val="accent1"/>
+          </a:effectRef>
+          <a:fontRef idx="minor">
+            <a:schemeClr val="lt1"/>
+          </a:fontRef>
+        </p:style>
+        <p:txBody>
+          <a:bodyPr rtlCol="0" anchor="ctr"/>
+          <a:lstStyle/>
+          <a:p>
+            <a:pPr algn="ctr"/>
+            <a:endParaRPr lang="ru-RU">
+              <a:solidFill>
+                <a:schemeClr val="bg1"/>
+              </a:solidFill>
+              <a:latin typeface="Bahnschrift SemiBold SemiConden" panose="020B0502040204020203" pitchFamily="34" charset="0"/>
+            </a:endParaRPr>
+          </a:p>
+        </p:txBody>
+      </p:sp>
+      <p:sp>
+        <p:nvSpPr>
           <p:cNvPr id="2" name="Заголовок 1">
             <a:extLst>
               <a:ext uri="{FF2B5EF4-FFF2-40B4-BE49-F238E27FC236}">
-                <a16:creationId xmlns:a16="http://schemas.microsoft.com/office/drawing/2014/main" id="{85AF70B3-888B-4B35-9AB0-987D2ED7BCC8}"/>
+                <a16:creationId xmlns:a16="http://schemas.microsoft.com/office/drawing/2014/main" id="{BEBD06C4-9DD5-4C01-924E-25C48BCFCCC3}"/>
               </a:ext>
             </a:extLst>
           </p:cNvPr>
@@ -5022,57 +5153,25 @@
             <p:ph type="title"/>
           </p:nvPr>
         </p:nvSpPr>
-        <p:spPr/>
-        <p:txBody>
-          <a:bodyPr/>
-          <a:lstStyle/>
-          <a:p>
-            <a:r>
-              <a:rPr lang="ru-RU" dirty="0"/>
-              <a:t>Будущее проекта</a:t>
-            </a:r>
-          </a:p>
-        </p:txBody>
-      </p:sp>
-      <p:sp>
-        <p:nvSpPr>
-          <p:cNvPr id="3" name="Объект 2">
-            <a:extLst>
-              <a:ext uri="{FF2B5EF4-FFF2-40B4-BE49-F238E27FC236}">
-                <a16:creationId xmlns:a16="http://schemas.microsoft.com/office/drawing/2014/main" id="{B8A6D778-10EF-4D17-9414-5023E6652829}"/>
-              </a:ext>
-            </a:extLst>
-          </p:cNvPr>
-          <p:cNvSpPr>
-            <a:spLocks noGrp="1"/>
-          </p:cNvSpPr>
-          <p:nvPr>
-            <p:ph idx="1"/>
-          </p:nvPr>
-        </p:nvSpPr>
-        <p:spPr/>
-        <p:txBody>
-          <a:bodyPr/>
-          <a:lstStyle/>
-          <a:p>
-            <a:r>
-              <a:rPr lang="ru-RU" dirty="0"/>
-              <a:t>Что можно улучшить</a:t>
-            </a:r>
-          </a:p>
-          <a:p>
-            <a:r>
-              <a:rPr lang="ru-RU" dirty="0"/>
-              <a:t>Какие функции добавить</a:t>
-            </a:r>
-          </a:p>
-          <a:p>
-            <a:pPr marL="0" indent="0">
-              <a:buNone/>
-            </a:pPr>
-            <a:r>
-              <a:rPr lang="ru-RU" dirty="0"/>
-              <a:t>И т.д.</a:t>
+        <p:spPr>
+          <a:xfrm>
+            <a:off x="838200" y="2766218"/>
+            <a:ext cx="10515600" cy="1325563"/>
+          </a:xfrm>
+        </p:spPr>
+        <p:txBody>
+          <a:bodyPr/>
+          <a:lstStyle/>
+          <a:p>
+            <a:pPr algn="ctr"/>
+            <a:r>
+              <a:rPr lang="ru-RU" dirty="0">
+                <a:solidFill>
+                  <a:schemeClr val="bg1"/>
+                </a:solidFill>
+                <a:latin typeface="Bahnschrift SemiBold SemiConden" panose="020B0502040204020203" pitchFamily="34" charset="0"/>
+              </a:rPr>
+              <a:t>Спасибо за внимание!</a:t>
             </a:r>
           </a:p>
         </p:txBody>
@@ -5080,117 +5179,7 @@
     </p:spTree>
     <p:extLst>
       <p:ext uri="{BB962C8B-B14F-4D97-AF65-F5344CB8AC3E}">
-        <p14:creationId xmlns:p14="http://schemas.microsoft.com/office/powerpoint/2010/main" val="1797280413"/>
-      </p:ext>
-    </p:extLst>
-  </p:cSld>
-  <p:clrMapOvr>
-    <a:masterClrMapping/>
-  </p:clrMapOvr>
-</p:sld>
-</file>
-
-<file path=ppt/slides/slide9.xml><?xml version="1.0" encoding="utf-8"?>
-<p:sld xmlns:a="http://schemas.openxmlformats.org/drawingml/2006/main" xmlns:r="http://schemas.openxmlformats.org/officeDocument/2006/relationships" xmlns:p="http://schemas.openxmlformats.org/presentationml/2006/main">
-  <p:cSld>
-    <p:spTree>
-      <p:nvGrpSpPr>
-        <p:cNvPr id="1" name=""/>
-        <p:cNvGrpSpPr/>
-        <p:nvPr/>
-      </p:nvGrpSpPr>
-      <p:grpSpPr>
-        <a:xfrm>
-          <a:off x="0" y="0"/>
-          <a:ext cx="0" cy="0"/>
-          <a:chOff x="0" y="0"/>
-          <a:chExt cx="0" cy="0"/>
-        </a:xfrm>
-      </p:grpSpPr>
-      <p:sp>
-        <p:nvSpPr>
-          <p:cNvPr id="2" name="Заголовок 1">
-            <a:extLst>
-              <a:ext uri="{FF2B5EF4-FFF2-40B4-BE49-F238E27FC236}">
-                <a16:creationId xmlns:a16="http://schemas.microsoft.com/office/drawing/2014/main" id="{31696C5B-0746-4725-AACC-953174C4CC3C}"/>
-              </a:ext>
-            </a:extLst>
-          </p:cNvPr>
-          <p:cNvSpPr>
-            <a:spLocks noGrp="1"/>
-          </p:cNvSpPr>
-          <p:nvPr>
-            <p:ph type="title"/>
-          </p:nvPr>
-        </p:nvSpPr>
-        <p:spPr/>
-        <p:txBody>
-          <a:bodyPr/>
-          <a:lstStyle/>
-          <a:p>
-            <a:r>
-              <a:rPr lang="ru-RU" dirty="0"/>
-              <a:t>Собственное впечатление от проекта</a:t>
-            </a:r>
-          </a:p>
-        </p:txBody>
-      </p:sp>
-      <p:sp>
-        <p:nvSpPr>
-          <p:cNvPr id="3" name="Объект 2">
-            <a:extLst>
-              <a:ext uri="{FF2B5EF4-FFF2-40B4-BE49-F238E27FC236}">
-                <a16:creationId xmlns:a16="http://schemas.microsoft.com/office/drawing/2014/main" id="{3B31CDFF-B37D-4042-BEA5-4B6E199BA6EB}"/>
-              </a:ext>
-            </a:extLst>
-          </p:cNvPr>
-          <p:cNvSpPr>
-            <a:spLocks noGrp="1"/>
-          </p:cNvSpPr>
-          <p:nvPr>
-            <p:ph idx="1"/>
-          </p:nvPr>
-        </p:nvSpPr>
-        <p:spPr/>
-        <p:txBody>
-          <a:bodyPr/>
-          <a:lstStyle/>
-          <a:p>
-            <a:r>
-              <a:rPr lang="ru-RU" dirty="0"/>
-              <a:t>Что было сложно</a:t>
-            </a:r>
-          </a:p>
-          <a:p>
-            <a:r>
-              <a:rPr lang="ru-RU" dirty="0"/>
-              <a:t>Что получилось легко</a:t>
-            </a:r>
-          </a:p>
-          <a:p>
-            <a:r>
-              <a:rPr lang="ru-RU" dirty="0"/>
-              <a:t>Что было делать интереснее всего</a:t>
-            </a:r>
-          </a:p>
-          <a:p>
-            <a:r>
-              <a:rPr lang="ru-RU" dirty="0"/>
-              <a:t>Какие недостатки вы заметили в своей работе?</a:t>
-            </a:r>
-          </a:p>
-          <a:p>
-            <a:r>
-              <a:rPr lang="ru-RU" dirty="0"/>
-              <a:t>Какие знания вы приобрели при работе с проектом?</a:t>
-            </a:r>
-          </a:p>
-        </p:txBody>
-      </p:sp>
-    </p:spTree>
-    <p:extLst>
-      <p:ext uri="{BB962C8B-B14F-4D97-AF65-F5344CB8AC3E}">
-        <p14:creationId xmlns:p14="http://schemas.microsoft.com/office/powerpoint/2010/main" val="1336577857"/>
+        <p14:creationId xmlns:p14="http://schemas.microsoft.com/office/powerpoint/2010/main" val="2988047741"/>
       </p:ext>
     </p:extLst>
   </p:cSld>
